--- a/documentos/BANNER_PI_80X120_2026_1.pptx
+++ b/documentos/BANNER_PI_80X120_2026_1.pptx
@@ -582,7 +582,7 @@
             <a:fld id="{1D8BD707-D9CF-40AE-B4C6-C98DA3205C09}" type="datetimeFigureOut">
               <a:rPr lang="en-US" smtClean="0"/>
               <a:pPr/>
-              <a:t>5/8/2026</a:t>
+              <a:t>5/13/2026</a:t>
             </a:fld>
             <a:endParaRPr lang="en-US"/>
           </a:p>
@@ -747,7 +747,7 @@
             <a:fld id="{1D8BD707-D9CF-40AE-B4C6-C98DA3205C09}" type="datetimeFigureOut">
               <a:rPr lang="en-US" smtClean="0"/>
               <a:pPr/>
-              <a:t>5/8/2026</a:t>
+              <a:t>5/13/2026</a:t>
             </a:fld>
             <a:endParaRPr lang="en-US"/>
           </a:p>
@@ -922,7 +922,7 @@
             <a:fld id="{1D8BD707-D9CF-40AE-B4C6-C98DA3205C09}" type="datetimeFigureOut">
               <a:rPr lang="en-US" smtClean="0"/>
               <a:pPr/>
-              <a:t>5/8/2026</a:t>
+              <a:t>5/13/2026</a:t>
             </a:fld>
             <a:endParaRPr lang="en-US"/>
           </a:p>
@@ -1087,7 +1087,7 @@
             <a:fld id="{1D8BD707-D9CF-40AE-B4C6-C98DA3205C09}" type="datetimeFigureOut">
               <a:rPr lang="en-US" smtClean="0"/>
               <a:pPr/>
-              <a:t>5/8/2026</a:t>
+              <a:t>5/13/2026</a:t>
             </a:fld>
             <a:endParaRPr lang="en-US"/>
           </a:p>
@@ -1329,7 +1329,7 @@
             <a:fld id="{1D8BD707-D9CF-40AE-B4C6-C98DA3205C09}" type="datetimeFigureOut">
               <a:rPr lang="en-US" smtClean="0"/>
               <a:pPr/>
-              <a:t>5/8/2026</a:t>
+              <a:t>5/13/2026</a:t>
             </a:fld>
             <a:endParaRPr lang="en-US"/>
           </a:p>
@@ -1611,7 +1611,7 @@
             <a:fld id="{1D8BD707-D9CF-40AE-B4C6-C98DA3205C09}" type="datetimeFigureOut">
               <a:rPr lang="en-US" smtClean="0"/>
               <a:pPr/>
-              <a:t>5/8/2026</a:t>
+              <a:t>5/13/2026</a:t>
             </a:fld>
             <a:endParaRPr lang="en-US"/>
           </a:p>
@@ -2027,7 +2027,7 @@
             <a:fld id="{1D8BD707-D9CF-40AE-B4C6-C98DA3205C09}" type="datetimeFigureOut">
               <a:rPr lang="en-US" smtClean="0"/>
               <a:pPr/>
-              <a:t>5/8/2026</a:t>
+              <a:t>5/13/2026</a:t>
             </a:fld>
             <a:endParaRPr lang="en-US"/>
           </a:p>
@@ -2141,7 +2141,7 @@
             <a:fld id="{1D8BD707-D9CF-40AE-B4C6-C98DA3205C09}" type="datetimeFigureOut">
               <a:rPr lang="en-US" smtClean="0"/>
               <a:pPr/>
-              <a:t>5/8/2026</a:t>
+              <a:t>5/13/2026</a:t>
             </a:fld>
             <a:endParaRPr lang="en-US"/>
           </a:p>
@@ -2233,7 +2233,7 @@
             <a:fld id="{1D8BD707-D9CF-40AE-B4C6-C98DA3205C09}" type="datetimeFigureOut">
               <a:rPr lang="en-US" smtClean="0"/>
               <a:pPr/>
-              <a:t>5/8/2026</a:t>
+              <a:t>5/13/2026</a:t>
             </a:fld>
             <a:endParaRPr lang="en-US"/>
           </a:p>
@@ -2505,7 +2505,7 @@
             <a:fld id="{1D8BD707-D9CF-40AE-B4C6-C98DA3205C09}" type="datetimeFigureOut">
               <a:rPr lang="en-US" smtClean="0"/>
               <a:pPr/>
-              <a:t>5/8/2026</a:t>
+              <a:t>5/13/2026</a:t>
             </a:fld>
             <a:endParaRPr lang="en-US"/>
           </a:p>
@@ -2754,7 +2754,7 @@
             <a:fld id="{1D8BD707-D9CF-40AE-B4C6-C98DA3205C09}" type="datetimeFigureOut">
               <a:rPr lang="en-US" smtClean="0"/>
               <a:pPr/>
-              <a:t>5/8/2026</a:t>
+              <a:t>5/13/2026</a:t>
             </a:fld>
             <a:endParaRPr lang="en-US"/>
           </a:p>
@@ -2962,7 +2962,7 @@
             <a:fld id="{1D8BD707-D9CF-40AE-B4C6-C98DA3205C09}" type="datetimeFigureOut">
               <a:rPr lang="en-US" smtClean="0"/>
               <a:pPr/>
-              <a:t>5/8/2026</a:t>
+              <a:t>5/13/2026</a:t>
             </a:fld>
             <a:endParaRPr lang="en-US"/>
           </a:p>
@@ -6213,7 +6213,7 @@
           <p:nvPr/>
         </p:nvPicPr>
         <p:blipFill>
-          <a:blip r:embed="rId6">
+          <a:blip r:embed="rId6" cstate="print">
             <a:extLst>
               <a:ext uri="{28A0092B-C50C-407E-A947-70E740481C1C}">
                 <a14:useLocalDpi xmlns:a14="http://schemas.microsoft.com/office/drawing/2010/main" val="0"/>
@@ -6307,7 +6307,7 @@
           <p:nvPr/>
         </p:nvPicPr>
         <p:blipFill>
-          <a:blip r:embed="rId8">
+          <a:blip r:embed="rId8" cstate="print">
             <a:extLst>
               <a:ext uri="{28A0092B-C50C-407E-A947-70E740481C1C}">
                 <a14:useLocalDpi xmlns:a14="http://schemas.microsoft.com/office/drawing/2010/main" val="0"/>
@@ -6354,7 +6354,7 @@
           <p:nvPr/>
         </p:nvPicPr>
         <p:blipFill>
-          <a:blip r:embed="rId9">
+          <a:blip r:embed="rId9" cstate="print">
             <a:extLst>
               <a:ext uri="{28A0092B-C50C-407E-A947-70E740481C1C}">
                 <a14:useLocalDpi xmlns:a14="http://schemas.microsoft.com/office/drawing/2010/main" val="0"/>
@@ -6478,6 +6478,126 @@
               </a14:hiddenFill>
             </a:ext>
           </a:extLst>
+        </p:spPr>
+      </p:pic>
+      <p:pic>
+        <p:nvPicPr>
+          <p:cNvPr id="46" name="Imagem 45">
+            <a:extLst>
+              <a:ext uri="{FF2B5EF4-FFF2-40B4-BE49-F238E27FC236}">
+                <a16:creationId xmlns:a16="http://schemas.microsoft.com/office/drawing/2014/main" id="{D564BD28-59A9-249B-243E-7D0C6474DE2A}"/>
+              </a:ext>
+            </a:extLst>
+          </p:cNvPr>
+          <p:cNvPicPr>
+            <a:picLocks noChangeAspect="1"/>
+          </p:cNvPicPr>
+          <p:nvPr/>
+        </p:nvPicPr>
+        <p:blipFill>
+          <a:blip r:embed="rId12"/>
+          <a:stretch>
+            <a:fillRect/>
+          </a:stretch>
+        </p:blipFill>
+        <p:spPr>
+          <a:xfrm>
+            <a:off x="15557616" y="23502452"/>
+            <a:ext cx="5929196" cy="2711113"/>
+          </a:xfrm>
+          <a:prstGeom prst="rect">
+            <a:avLst/>
+          </a:prstGeom>
+        </p:spPr>
+      </p:pic>
+      <p:pic>
+        <p:nvPicPr>
+          <p:cNvPr id="58" name="Imagem 57">
+            <a:extLst>
+              <a:ext uri="{FF2B5EF4-FFF2-40B4-BE49-F238E27FC236}">
+                <a16:creationId xmlns:a16="http://schemas.microsoft.com/office/drawing/2014/main" id="{1E776CE2-5722-5913-0C76-DFADDC3CCDBF}"/>
+              </a:ext>
+            </a:extLst>
+          </p:cNvPr>
+          <p:cNvPicPr>
+            <a:picLocks noChangeAspect="1"/>
+          </p:cNvPicPr>
+          <p:nvPr/>
+        </p:nvPicPr>
+        <p:blipFill>
+          <a:blip r:embed="rId13"/>
+          <a:stretch>
+            <a:fillRect/>
+          </a:stretch>
+        </p:blipFill>
+        <p:spPr>
+          <a:xfrm>
+            <a:off x="21563012" y="23502450"/>
+            <a:ext cx="6014585" cy="2711115"/>
+          </a:xfrm>
+          <a:prstGeom prst="rect">
+            <a:avLst/>
+          </a:prstGeom>
+        </p:spPr>
+      </p:pic>
+      <p:pic>
+        <p:nvPicPr>
+          <p:cNvPr id="60" name="Imagem 59">
+            <a:extLst>
+              <a:ext uri="{FF2B5EF4-FFF2-40B4-BE49-F238E27FC236}">
+                <a16:creationId xmlns:a16="http://schemas.microsoft.com/office/drawing/2014/main" id="{29B5F49A-0960-7E42-B5D2-F01EB7FE3190}"/>
+              </a:ext>
+            </a:extLst>
+          </p:cNvPr>
+          <p:cNvPicPr>
+            <a:picLocks noChangeAspect="1"/>
+          </p:cNvPicPr>
+          <p:nvPr/>
+        </p:nvPicPr>
+        <p:blipFill>
+          <a:blip r:embed="rId14"/>
+          <a:stretch>
+            <a:fillRect/>
+          </a:stretch>
+        </p:blipFill>
+        <p:spPr>
+          <a:xfrm>
+            <a:off x="21563012" y="26321851"/>
+            <a:ext cx="5977252" cy="2724632"/>
+          </a:xfrm>
+          <a:prstGeom prst="rect">
+            <a:avLst/>
+          </a:prstGeom>
+        </p:spPr>
+      </p:pic>
+      <p:pic>
+        <p:nvPicPr>
+          <p:cNvPr id="62" name="Imagem 61">
+            <a:extLst>
+              <a:ext uri="{FF2B5EF4-FFF2-40B4-BE49-F238E27FC236}">
+                <a16:creationId xmlns:a16="http://schemas.microsoft.com/office/drawing/2014/main" id="{CBE79C1B-DE94-7568-5416-EFFA23A147C3}"/>
+              </a:ext>
+            </a:extLst>
+          </p:cNvPr>
+          <p:cNvPicPr>
+            <a:picLocks noChangeAspect="1"/>
+          </p:cNvPicPr>
+          <p:nvPr/>
+        </p:nvPicPr>
+        <p:blipFill>
+          <a:blip r:embed="rId15"/>
+          <a:stretch>
+            <a:fillRect/>
+          </a:stretch>
+        </p:blipFill>
+        <p:spPr>
+          <a:xfrm>
+            <a:off x="15543212" y="26321851"/>
+            <a:ext cx="5916990" cy="2746068"/>
+          </a:xfrm>
+          <a:prstGeom prst="rect">
+            <a:avLst/>
+          </a:prstGeom>
         </p:spPr>
       </p:pic>
     </p:spTree>
